--- a/surge_dist/deck/delphi_technical.pptx
+++ b/surge_dist/deck/delphi_technical.pptx
@@ -3631,7 +3631,7 @@
           <a:lstStyle/>
           <a:p>
             <a:r>
-              <a:t>Heuristics, aggregation math, and information flow: MiroFish public service vs Delphi3080 vs DelphiCursor  ·  Marty Schoffstall, co-author</a:t>
+              <a:t>Heuristics, aggregation math, and information flow: MiroFish public service vs Delphi3080 vs DelphiCursor  ·  Marty Schoffstall, co-author  ·  github.com/martyschoff/veracity2</a:t>
             </a:r>
           </a:p>
         </p:txBody>
